--- a/ietf125-Shenzhen/slides/OPS-WG-Updates-IPPM-BMWG-PERFMETRDIR.pptx
+++ b/ietf125-Shenzhen/slides/OPS-WG-Updates-IPPM-BMWG-PERFMETRDIR.pptx
@@ -5,10 +5,11 @@
     <p:sldMasterId id="2147483648" r:id="rId1"/>
   </p:sldMasterIdLst>
   <p:notesMasterIdLst>
-    <p:notesMasterId r:id="rId3"/>
+    <p:notesMasterId r:id="rId4"/>
   </p:notesMasterIdLst>
   <p:sldIdLst>
     <p:sldId id="257" r:id="rId2"/>
+    <p:sldId id="258" r:id="rId3"/>
   </p:sldIdLst>
   <p:sldSz cx="12192000" cy="6858000"/>
   <p:notesSz cx="6858000" cy="9144000"/>
@@ -142,38 +143,6 @@
     </pc:docChg>
   </pc:docChgLst>
   <pc:docChgLst>
-    <pc:chgData name="BOUCADAIR Mohamed INNOV/NET" userId="2acbca90-6db1-4111-98c4-832797dda751" providerId="ADAL" clId="{A64BD271-A47C-4266-84F7-4325E25623CE}"/>
-    <pc:docChg chg="custSel modSld">
-      <pc:chgData name="BOUCADAIR Mohamed INNOV/NET" userId="2acbca90-6db1-4111-98c4-832797dda751" providerId="ADAL" clId="{A64BD271-A47C-4266-84F7-4325E25623CE}" dt="2026-02-27T14:55:56.960" v="2" actId="20577"/>
-      <pc:docMkLst>
-        <pc:docMk/>
-      </pc:docMkLst>
-      <pc:sldChg chg="modSp mod">
-        <pc:chgData name="BOUCADAIR Mohamed INNOV/NET" userId="2acbca90-6db1-4111-98c4-832797dda751" providerId="ADAL" clId="{A64BD271-A47C-4266-84F7-4325E25623CE}" dt="2026-02-27T14:55:56.960" v="2" actId="20577"/>
-        <pc:sldMkLst>
-          <pc:docMk/>
-          <pc:sldMk cId="132822887" sldId="257"/>
-        </pc:sldMkLst>
-        <pc:spChg chg="mod">
-          <ac:chgData name="BOUCADAIR Mohamed INNOV/NET" userId="2acbca90-6db1-4111-98c4-832797dda751" providerId="ADAL" clId="{A64BD271-A47C-4266-84F7-4325E25623CE}" dt="2026-02-27T14:55:49.918" v="1" actId="20577"/>
-          <ac:spMkLst>
-            <pc:docMk/>
-            <pc:sldMk cId="132822887" sldId="257"/>
-            <ac:spMk id="3" creationId="{5082E14F-0499-0D67-CCEB-98C164D73BB5}"/>
-          </ac:spMkLst>
-        </pc:spChg>
-        <pc:spChg chg="mod">
-          <ac:chgData name="BOUCADAIR Mohamed INNOV/NET" userId="2acbca90-6db1-4111-98c4-832797dda751" providerId="ADAL" clId="{A64BD271-A47C-4266-84F7-4325E25623CE}" dt="2026-02-27T14:55:56.960" v="2" actId="20577"/>
-          <ac:spMkLst>
-            <pc:docMk/>
-            <pc:sldMk cId="132822887" sldId="257"/>
-            <ac:spMk id="5" creationId="{CBE55EBD-1B16-433A-2B82-E65DC5EA1A56}"/>
-          </ac:spMkLst>
-        </pc:spChg>
-      </pc:sldChg>
-    </pc:docChg>
-  </pc:docChgLst>
-  <pc:docChgLst>
     <pc:chgData name="Graf Thomas, SCS-INI-NET-VNC-E2E" userId="487bc3e3-9ce7-4cdd-b7b4-8899ea88d289" providerId="ADAL" clId="{ADEEF08A-D719-4B50-A383-4105EDA2C206}"/>
     <pc:docChg chg="undo custSel modSld">
       <pc:chgData name="Graf Thomas, SCS-INI-NET-VNC-E2E" userId="487bc3e3-9ce7-4cdd-b7b4-8899ea88d289" providerId="ADAL" clId="{ADEEF08A-D719-4B50-A383-4105EDA2C206}" dt="2026-03-08T10:33:29.740" v="1167" actId="20577"/>
@@ -221,6 +190,38 @@
       </pc:sldChg>
     </pc:docChg>
   </pc:docChgLst>
+  <pc:docChgLst>
+    <pc:chgData name="BOUCADAIR Mohamed INNOV/NET" userId="2acbca90-6db1-4111-98c4-832797dda751" providerId="ADAL" clId="{A64BD271-A47C-4266-84F7-4325E25623CE}"/>
+    <pc:docChg chg="custSel modSld">
+      <pc:chgData name="BOUCADAIR Mohamed INNOV/NET" userId="2acbca90-6db1-4111-98c4-832797dda751" providerId="ADAL" clId="{A64BD271-A47C-4266-84F7-4325E25623CE}" dt="2026-02-27T14:55:56.960" v="2" actId="20577"/>
+      <pc:docMkLst>
+        <pc:docMk/>
+      </pc:docMkLst>
+      <pc:sldChg chg="modSp mod">
+        <pc:chgData name="BOUCADAIR Mohamed INNOV/NET" userId="2acbca90-6db1-4111-98c4-832797dda751" providerId="ADAL" clId="{A64BD271-A47C-4266-84F7-4325E25623CE}" dt="2026-02-27T14:55:56.960" v="2" actId="20577"/>
+        <pc:sldMkLst>
+          <pc:docMk/>
+          <pc:sldMk cId="132822887" sldId="257"/>
+        </pc:sldMkLst>
+        <pc:spChg chg="mod">
+          <ac:chgData name="BOUCADAIR Mohamed INNOV/NET" userId="2acbca90-6db1-4111-98c4-832797dda751" providerId="ADAL" clId="{A64BD271-A47C-4266-84F7-4325E25623CE}" dt="2026-02-27T14:55:49.918" v="1" actId="20577"/>
+          <ac:spMkLst>
+            <pc:docMk/>
+            <pc:sldMk cId="132822887" sldId="257"/>
+            <ac:spMk id="3" creationId="{5082E14F-0499-0D67-CCEB-98C164D73BB5}"/>
+          </ac:spMkLst>
+        </pc:spChg>
+        <pc:spChg chg="mod">
+          <ac:chgData name="BOUCADAIR Mohamed INNOV/NET" userId="2acbca90-6db1-4111-98c4-832797dda751" providerId="ADAL" clId="{A64BD271-A47C-4266-84F7-4325E25623CE}" dt="2026-02-27T14:55:56.960" v="2" actId="20577"/>
+          <ac:spMkLst>
+            <pc:docMk/>
+            <pc:sldMk cId="132822887" sldId="257"/>
+            <ac:spMk id="5" creationId="{CBE55EBD-1B16-433A-2B82-E65DC5EA1A56}"/>
+          </ac:spMkLst>
+        </pc:spChg>
+      </pc:sldChg>
+    </pc:docChg>
+  </pc:docChgLst>
 </pc:chgInfo>
 </file>
 
@@ -306,7 +307,7 @@
           <a:p>
             <a:fld id="{993813BE-9644-4EB0-A6C4-0B9517916EF9}" type="datetimeFigureOut">
               <a:rPr lang="fr-FR" smtClean="0"/>
-              <a:t>08/03/2026</a:t>
+              <a:t>09/03/2026</a:t>
             </a:fld>
             <a:endParaRPr lang="fr-FR" dirty="0"/>
           </a:p>
@@ -657,6 +658,90 @@
 </p:notes>
 </file>
 
+<file path=ppt/notesSlides/notesSlide2.xml><?xml version="1.0" encoding="utf-8"?>
+<p:notes xmlns:a="http://schemas.openxmlformats.org/drawingml/2006/main" xmlns:r="http://schemas.openxmlformats.org/officeDocument/2006/relationships" xmlns:p="http://schemas.openxmlformats.org/presentationml/2006/main">
+  <p:cSld>
+    <p:spTree>
+      <p:nvGrpSpPr>
+        <p:cNvPr id="1" name=""/>
+        <p:cNvGrpSpPr/>
+        <p:nvPr/>
+      </p:nvGrpSpPr>
+      <p:grpSpPr>
+        <a:xfrm>
+          <a:off x="0" y="0"/>
+          <a:ext cx="0" cy="0"/>
+          <a:chOff x="0" y="0"/>
+          <a:chExt cx="0" cy="0"/>
+        </a:xfrm>
+      </p:grpSpPr>
+      <p:sp>
+        <p:nvSpPr>
+          <p:cNvPr id="2" name="Espace réservé de l'image des diapositives 1"/>
+          <p:cNvSpPr>
+            <a:spLocks noGrp="1" noRot="1" noChangeAspect="1"/>
+          </p:cNvSpPr>
+          <p:nvPr>
+            <p:ph type="sldImg"/>
+          </p:nvPr>
+        </p:nvSpPr>
+        <p:spPr/>
+      </p:sp>
+      <p:sp>
+        <p:nvSpPr>
+          <p:cNvPr id="3" name="Espace réservé des notes 2"/>
+          <p:cNvSpPr>
+            <a:spLocks noGrp="1"/>
+          </p:cNvSpPr>
+          <p:nvPr>
+            <p:ph type="body" idx="1"/>
+          </p:nvPr>
+        </p:nvSpPr>
+        <p:spPr/>
+        <p:txBody>
+          <a:bodyPr/>
+          <a:lstStyle/>
+          <a:p>
+            <a:endParaRPr lang="fr-FR" dirty="0"/>
+          </a:p>
+        </p:txBody>
+      </p:sp>
+      <p:sp>
+        <p:nvSpPr>
+          <p:cNvPr id="4" name="Espace réservé du numéro de diapositive 3"/>
+          <p:cNvSpPr>
+            <a:spLocks noGrp="1"/>
+          </p:cNvSpPr>
+          <p:nvPr>
+            <p:ph type="sldNum" sz="quarter" idx="5"/>
+          </p:nvPr>
+        </p:nvSpPr>
+        <p:spPr/>
+        <p:txBody>
+          <a:bodyPr/>
+          <a:lstStyle/>
+          <a:p>
+            <a:fld id="{B6D3F37D-BF49-4E40-8231-8F5CF7906328}" type="slidenum">
+              <a:rPr lang="fr-FR" smtClean="0"/>
+              <a:t>2</a:t>
+            </a:fld>
+            <a:endParaRPr lang="fr-FR" dirty="0"/>
+          </a:p>
+        </p:txBody>
+      </p:sp>
+    </p:spTree>
+    <p:extLst>
+      <p:ext uri="{BB962C8B-B14F-4D97-AF65-F5344CB8AC3E}">
+        <p14:creationId xmlns:p14="http://schemas.microsoft.com/office/powerpoint/2010/main" val="2309380189"/>
+      </p:ext>
+    </p:extLst>
+  </p:cSld>
+  <p:clrMapOvr>
+    <a:masterClrMapping/>
+  </p:clrMapOvr>
+</p:notes>
+</file>
+
 <file path=ppt/slideLayouts/slideLayout1.xml><?xml version="1.0" encoding="utf-8"?>
 <p:sldLayout xmlns:a="http://schemas.openxmlformats.org/drawingml/2006/main" xmlns:r="http://schemas.openxmlformats.org/officeDocument/2006/relationships" xmlns:p="http://schemas.openxmlformats.org/presentationml/2006/main" type="title" preserve="1">
   <p:cSld name="Diapositive de titre">
@@ -804,7 +889,7 @@
           <a:p>
             <a:fld id="{AF3A2D09-215D-4610-87DE-176F93FAFFFB}" type="datetime1">
               <a:rPr lang="fr-FR" smtClean="0"/>
-              <a:t>08/03/2026</a:t>
+              <a:t>09/03/2026</a:t>
             </a:fld>
             <a:endParaRPr lang="fr-FR" dirty="0"/>
           </a:p>
@@ -1006,7 +1091,7 @@
           <a:p>
             <a:fld id="{7F2B3DBA-070E-4070-BF49-61ED05E982A8}" type="datetime1">
               <a:rPr lang="fr-FR" smtClean="0"/>
-              <a:t>08/03/2026</a:t>
+              <a:t>09/03/2026</a:t>
             </a:fld>
             <a:endParaRPr lang="fr-FR" dirty="0"/>
           </a:p>
@@ -1218,7 +1303,7 @@
           <a:p>
             <a:fld id="{1861926C-C024-4DC6-8C34-EC76F14394CD}" type="datetime1">
               <a:rPr lang="fr-FR" smtClean="0"/>
-              <a:t>08/03/2026</a:t>
+              <a:t>09/03/2026</a:t>
             </a:fld>
             <a:endParaRPr lang="fr-FR" dirty="0"/>
           </a:p>
@@ -1420,7 +1505,7 @@
           <a:p>
             <a:fld id="{1FEACCCC-DFCC-4756-9119-F1F4182DEE79}" type="datetime1">
               <a:rPr lang="fr-FR" smtClean="0"/>
-              <a:t>08/03/2026</a:t>
+              <a:t>09/03/2026</a:t>
             </a:fld>
             <a:endParaRPr lang="fr-FR" dirty="0"/>
           </a:p>
@@ -1699,7 +1784,7 @@
           <a:p>
             <a:fld id="{F166DA53-6888-4012-9540-B1A2D306F057}" type="datetime1">
               <a:rPr lang="fr-FR" smtClean="0"/>
-              <a:t>08/03/2026</a:t>
+              <a:t>09/03/2026</a:t>
             </a:fld>
             <a:endParaRPr lang="fr-FR" dirty="0"/>
           </a:p>
@@ -1968,7 +2053,7 @@
           <a:p>
             <a:fld id="{B2712EA3-61AF-4B68-96B7-FD0EF5B6D1CF}" type="datetime1">
               <a:rPr lang="fr-FR" smtClean="0"/>
-              <a:t>08/03/2026</a:t>
+              <a:t>09/03/2026</a:t>
             </a:fld>
             <a:endParaRPr lang="fr-FR" dirty="0"/>
           </a:p>
@@ -2384,7 +2469,7 @@
           <a:p>
             <a:fld id="{397F3E34-6190-4D3B-AA13-9C745685F55B}" type="datetime1">
               <a:rPr lang="fr-FR" smtClean="0"/>
-              <a:t>08/03/2026</a:t>
+              <a:t>09/03/2026</a:t>
             </a:fld>
             <a:endParaRPr lang="fr-FR" dirty="0"/>
           </a:p>
@@ -2529,7 +2614,7 @@
           <a:p>
             <a:fld id="{16A0672A-08CA-4958-B194-97B82EC017A1}" type="datetime1">
               <a:rPr lang="fr-FR" smtClean="0"/>
-              <a:t>08/03/2026</a:t>
+              <a:t>09/03/2026</a:t>
             </a:fld>
             <a:endParaRPr lang="fr-FR" dirty="0"/>
           </a:p>
@@ -2646,7 +2731,7 @@
           <a:p>
             <a:fld id="{716B3D01-0A26-4955-A3B9-82886643D6B4}" type="datetime1">
               <a:rPr lang="fr-FR" smtClean="0"/>
-              <a:t>08/03/2026</a:t>
+              <a:t>09/03/2026</a:t>
             </a:fld>
             <a:endParaRPr lang="fr-FR" dirty="0"/>
           </a:p>
@@ -2961,7 +3046,7 @@
           <a:p>
             <a:fld id="{13A4B2D0-68E8-43E1-BC8F-2FA077EAE1FE}" type="datetime1">
               <a:rPr lang="fr-FR" smtClean="0"/>
-              <a:t>08/03/2026</a:t>
+              <a:t>09/03/2026</a:t>
             </a:fld>
             <a:endParaRPr lang="fr-FR" dirty="0"/>
           </a:p>
@@ -3253,7 +3338,7 @@
           <a:p>
             <a:fld id="{631352CE-85DA-4448-A952-A5096EB6C4CB}" type="datetime1">
               <a:rPr lang="fr-FR" smtClean="0"/>
-              <a:t>08/03/2026</a:t>
+              <a:t>09/03/2026</a:t>
             </a:fld>
             <a:endParaRPr lang="fr-FR" dirty="0"/>
           </a:p>
@@ -3498,7 +3583,7 @@
           <a:p>
             <a:fld id="{CBB112E7-EB8B-4390-BCC3-B52E854F5AF2}" type="datetime1">
               <a:rPr lang="fr-FR" smtClean="0"/>
-              <a:t>08/03/2026</a:t>
+              <a:t>09/03/2026</a:t>
             </a:fld>
             <a:endParaRPr lang="fr-FR" dirty="0"/>
           </a:p>
@@ -3943,7 +4028,7 @@
           <a:p>
             <a:r>
               <a:rPr lang="en-US" noProof="0" dirty="0"/>
-              <a:t>IP Performance Measurement (IPPM) and Benchmarking Methodology (BMWG)</a:t>
+              <a:t>IP Performance Measurement (IPPM)</a:t>
             </a:r>
           </a:p>
         </p:txBody>
@@ -3972,7 +4057,7 @@
         </p:spPr>
         <p:txBody>
           <a:bodyPr numCol="2">
-            <a:normAutofit fontScale="70000" lnSpcReduction="20000"/>
+            <a:normAutofit fontScale="85000" lnSpcReduction="20000"/>
           </a:bodyPr>
           <a:lstStyle/>
           <a:p>
@@ -3984,89 +4069,98 @@
           <a:p>
             <a:pPr lvl="1"/>
             <a:r>
+              <a:rPr lang="en-US" sz="2500" u="sng" noProof="0" dirty="0"/>
+              <a:t>draft-</a:t>
+            </a:r>
+            <a:r>
+              <a:rPr lang="en-US" sz="2500" u="sng" noProof="0" dirty="0" err="1"/>
+              <a:t>ietf</a:t>
+            </a:r>
+            <a:r>
+              <a:rPr lang="en-US" sz="2500" u="sng" noProof="0" dirty="0"/>
+              <a:t>-ippm-</a:t>
+            </a:r>
+            <a:r>
+              <a:rPr lang="en-US" sz="2500" u="sng" noProof="0" dirty="0" err="1"/>
+              <a:t>ioam</a:t>
+            </a:r>
+            <a:r>
+              <a:rPr lang="en-US" sz="2500" u="sng" noProof="0" dirty="0"/>
+              <a:t>-data-integrity</a:t>
+            </a:r>
+            <a:r>
               <a:rPr lang="en-US" sz="2500" noProof="0" dirty="0"/>
-              <a:t>Agenda is mainly driven by benchmarking, IOAM and STAMP related documents. </a:t>
+              <a:t> passed, and </a:t>
+            </a:r>
+            <a:r>
+              <a:rPr lang="en-US" sz="2500" u="sng" noProof="0" dirty="0"/>
+              <a:t>draft-</a:t>
+            </a:r>
+            <a:r>
+              <a:rPr lang="en-US" sz="2500" u="sng" noProof="0" dirty="0" err="1"/>
+              <a:t>ietf</a:t>
+            </a:r>
+            <a:r>
+              <a:rPr lang="en-US" sz="2500" u="sng" noProof="0" dirty="0"/>
+              <a:t>-ippm-</a:t>
+            </a:r>
+            <a:r>
+              <a:rPr lang="en-US" sz="2500" u="sng" noProof="0" dirty="0" err="1"/>
+              <a:t>ioam</a:t>
+            </a:r>
+            <a:r>
+              <a:rPr lang="en-US" sz="2500" u="sng" noProof="0" dirty="0"/>
+              <a:t>-integrity-yang</a:t>
+            </a:r>
+            <a:r>
+              <a:rPr lang="en-US" sz="2500" noProof="0" dirty="0"/>
+              <a:t> will end working group call end of this week so that both can be passed jointly to IESG.</a:t>
             </a:r>
           </a:p>
           <a:p>
             <a:pPr lvl="1"/>
             <a:r>
+              <a:rPr lang="en-US" sz="2500" u="sng" noProof="0" dirty="0"/>
+              <a:t>draft-</a:t>
+            </a:r>
+            <a:r>
+              <a:rPr lang="en-US" sz="2500" u="sng" noProof="0" dirty="0" err="1"/>
+              <a:t>ietf</a:t>
+            </a:r>
+            <a:r>
+              <a:rPr lang="en-US" sz="2500" u="sng" noProof="0" dirty="0"/>
+              <a:t>-ippm-stamp-</a:t>
+            </a:r>
+            <a:r>
+              <a:rPr lang="en-US" sz="2500" u="sng" noProof="0" dirty="0" err="1"/>
+              <a:t>ext</a:t>
+            </a:r>
+            <a:r>
+              <a:rPr lang="en-US" sz="2500" u="sng" noProof="0" dirty="0"/>
+              <a:t>-</a:t>
+            </a:r>
+            <a:r>
+              <a:rPr lang="en-US" sz="2500" u="sng" noProof="0" dirty="0" err="1"/>
+              <a:t>hdr</a:t>
+            </a:r>
+            <a:r>
               <a:rPr lang="en-US" sz="2500" noProof="0" dirty="0"/>
+              <a:t> proposing an extension to support IP packet header reflection used by IOAM were </a:t>
+            </a:r>
+            <a:r>
+              <a:rPr lang="en-US" sz="2500" u="sng" noProof="0" dirty="0"/>
               <a:t>draft-</a:t>
             </a:r>
             <a:r>
-              <a:rPr lang="en-US" sz="2500" noProof="0" dirty="0" err="1"/>
+              <a:rPr lang="en-US" sz="2500" u="sng" noProof="0" dirty="0" err="1"/>
               <a:t>ietf</a:t>
             </a:r>
             <a:r>
-              <a:rPr lang="en-US" sz="2500" noProof="0" dirty="0"/>
-              <a:t>-ippm-</a:t>
-            </a:r>
-            <a:r>
-              <a:rPr lang="en-US" sz="2500" noProof="0" dirty="0" err="1"/>
-              <a:t>ioam</a:t>
-            </a:r>
-            <a:r>
-              <a:rPr lang="en-US" sz="2500" noProof="0" dirty="0"/>
-              <a:t>-data-integrity passed, and draft-</a:t>
-            </a:r>
-            <a:r>
-              <a:rPr lang="en-US" sz="2500" noProof="0" dirty="0" err="1"/>
-              <a:t>ietf</a:t>
-            </a:r>
-            <a:r>
-              <a:rPr lang="en-US" sz="2500" noProof="0" dirty="0"/>
-              <a:t>-ippm-</a:t>
-            </a:r>
-            <a:r>
-              <a:rPr lang="en-US" sz="2500" noProof="0" dirty="0" err="1"/>
-              <a:t>ioam</a:t>
-            </a:r>
-            <a:r>
-              <a:rPr lang="en-US" sz="2500" noProof="0" dirty="0"/>
-              <a:t>-integrity-yang will end working group call end of this week so that both can be passed jointly to IESG.</a:t>
-            </a:r>
-          </a:p>
-          <a:p>
-            <a:pPr lvl="1"/>
-            <a:r>
-              <a:rPr lang="en-US" sz="2500" noProof="0" dirty="0"/>
-              <a:t>draft-</a:t>
-            </a:r>
-            <a:r>
-              <a:rPr lang="en-US" sz="2500" noProof="0" dirty="0" err="1"/>
-              <a:t>ietf</a:t>
-            </a:r>
-            <a:r>
-              <a:rPr lang="en-US" sz="2500" noProof="0" dirty="0"/>
-              <a:t>-ippm-stamp-</a:t>
-            </a:r>
-            <a:r>
-              <a:rPr lang="en-US" sz="2500" noProof="0" dirty="0" err="1"/>
-              <a:t>ext</a:t>
-            </a:r>
-            <a:r>
-              <a:rPr lang="en-US" sz="2500" noProof="0" dirty="0"/>
-              <a:t>-</a:t>
-            </a:r>
-            <a:r>
-              <a:rPr lang="en-US" sz="2500" noProof="0" dirty="0" err="1"/>
-              <a:t>hdr</a:t>
-            </a:r>
-            <a:r>
-              <a:rPr lang="en-US" sz="2500" noProof="0" dirty="0"/>
-              <a:t> proposing an extension to support IP packet header reflection used by IOAM were draft-</a:t>
-            </a:r>
-            <a:r>
-              <a:rPr lang="en-US" sz="2500" noProof="0" dirty="0" err="1"/>
-              <a:t>ietf</a:t>
-            </a:r>
-            <a:r>
-              <a:rPr lang="en-US" sz="2500" noProof="0" dirty="0"/>
+              <a:rPr lang="en-US" sz="2500" u="sng" noProof="0" dirty="0"/>
               <a:t>-ippm-stamp-cos-</a:t>
             </a:r>
             <a:r>
-              <a:rPr lang="en-US" sz="2500" noProof="0" dirty="0" err="1"/>
+              <a:rPr lang="en-US" sz="2500" u="sng" noProof="0" dirty="0" err="1"/>
               <a:t>ecn</a:t>
             </a:r>
             <a:r>
@@ -4088,102 +4182,57 @@
               <a:rPr lang="en-US" sz="2500" noProof="0" dirty="0"/>
               <a:t>-on-path-telemetry-flag. Proposes MPLS Network Actions (MNA) flag to support OAM in MPLS networks.</a:t>
             </a:r>
+            <a:endParaRPr lang="en-US" sz="2600" noProof="0" dirty="0"/>
+          </a:p>
+          <a:p>
+            <a:pPr marL="457200" lvl="1" indent="0">
+              <a:buNone/>
+            </a:pPr>
+            <a:endParaRPr lang="en-US" sz="2600" noProof="0" dirty="0"/>
+          </a:p>
+          <a:p>
+            <a:r>
+              <a:rPr lang="en-US" b="1" noProof="0" dirty="0"/>
+              <a:t>Main Achievements Since IETF#124</a:t>
+            </a:r>
           </a:p>
           <a:p>
             <a:pPr lvl="1"/>
             <a:r>
-              <a:rPr lang="en-US" sz="2600" noProof="0" dirty="0"/>
-              <a:t>Several AI fabric benchmarking documents has been newly proposed at IETF </a:t>
-            </a:r>
-            <a:r>
-              <a:rPr lang="en-US" sz="2600" noProof="0"/>
-              <a:t>125.</a:t>
-            </a:r>
-          </a:p>
-          <a:p>
-            <a:pPr marL="457200" lvl="1" indent="0">
-              <a:buNone/>
-            </a:pPr>
-            <a:endParaRPr lang="en-US" sz="2600" noProof="0"/>
-          </a:p>
-          <a:p>
-            <a:r>
-              <a:rPr lang="en-US" b="1" noProof="0"/>
-              <a:t>Main </a:t>
-            </a:r>
-            <a:r>
-              <a:rPr lang="en-US" b="1" noProof="0" dirty="0"/>
-              <a:t>Achievements Since IETF#124</a:t>
-            </a:r>
-          </a:p>
-          <a:p>
-            <a:pPr lvl="1"/>
+              <a:rPr lang="en-US" u="sng" noProof="0" dirty="0"/>
+              <a:t>draft-</a:t>
+            </a:r>
+            <a:r>
+              <a:rPr lang="en-US" u="sng" noProof="0" dirty="0" err="1"/>
+              <a:t>ietf</a:t>
+            </a:r>
+            <a:r>
+              <a:rPr lang="en-US" u="sng" noProof="0" dirty="0"/>
+              <a:t>-ippm-asymmetrical-pkts</a:t>
+            </a:r>
             <a:r>
               <a:rPr lang="en-US" noProof="0" dirty="0"/>
+              <a:t> and </a:t>
+            </a:r>
+            <a:r>
+              <a:rPr lang="en-US" u="sng" noProof="0" dirty="0"/>
               <a:t>draft-</a:t>
             </a:r>
             <a:r>
-              <a:rPr lang="en-US" noProof="0" dirty="0" err="1"/>
+              <a:rPr lang="en-US" u="sng" noProof="0" dirty="0" err="1"/>
               <a:t>ietf</a:t>
             </a:r>
             <a:r>
-              <a:rPr lang="en-US" noProof="0" dirty="0"/>
-              <a:t>-ippm-asymmetrical-pkts and draft-</a:t>
-            </a:r>
-            <a:r>
-              <a:rPr lang="en-US" noProof="0" dirty="0" err="1"/>
-              <a:t>ietf</a:t>
-            </a:r>
-            <a:r>
-              <a:rPr lang="en-US" noProof="0" dirty="0"/>
+              <a:rPr lang="en-US" u="sng" noProof="0" dirty="0"/>
               <a:t>-ippm-</a:t>
             </a:r>
             <a:r>
-              <a:rPr lang="en-US" noProof="0" dirty="0" err="1"/>
+              <a:rPr lang="en-US" u="sng" noProof="0" dirty="0" err="1"/>
               <a:t>qoo</a:t>
             </a:r>
             <a:r>
               <a:rPr lang="en-US" noProof="0" dirty="0"/>
               <a:t> received good feedback from IESG. Once open discuss are addressed, they are ready for IESG last call.</a:t>
-            </a:r>
-          </a:p>
-          <a:p>
-            <a:pPr lvl="1"/>
-            <a:r>
-              <a:rPr lang="en-US" noProof="0" dirty="0"/>
-              <a:t>draft-</a:t>
-            </a:r>
-            <a:r>
-              <a:rPr lang="en-US" noProof="0" dirty="0" err="1"/>
-              <a:t>ietf</a:t>
-            </a:r>
-            <a:r>
-              <a:rPr lang="en-US" noProof="0" dirty="0"/>
-              <a:t>-bmwg-network-tester-</a:t>
-            </a:r>
-            <a:r>
-              <a:rPr lang="en-US" noProof="0" dirty="0" err="1"/>
-              <a:t>cfg</a:t>
-            </a:r>
-            <a:r>
-              <a:rPr lang="en-US" noProof="0" dirty="0"/>
-              <a:t> and draft-</a:t>
-            </a:r>
-            <a:r>
-              <a:rPr lang="en-US" noProof="0" dirty="0" err="1"/>
-              <a:t>ietf</a:t>
-            </a:r>
-            <a:r>
-              <a:rPr lang="en-US" noProof="0" dirty="0"/>
-              <a:t>-bmwg-</a:t>
-            </a:r>
-            <a:r>
-              <a:rPr lang="en-US" noProof="0" dirty="0" err="1"/>
-              <a:t>sr</a:t>
-            </a:r>
-            <a:r>
-              <a:rPr lang="en-US" noProof="0" dirty="0"/>
-              <a:t>-bench-meth passed both working group last call and require updates before shepherd review.</a:t>
             </a:r>
           </a:p>
           <a:p>
@@ -4299,6 +4348,355 @@
     <p:extLst>
       <p:ext uri="{BB962C8B-B14F-4D97-AF65-F5344CB8AC3E}">
         <p14:creationId xmlns:p14="http://schemas.microsoft.com/office/powerpoint/2010/main" val="132822887"/>
+      </p:ext>
+    </p:extLst>
+  </p:cSld>
+  <p:clrMapOvr>
+    <a:masterClrMapping/>
+  </p:clrMapOvr>
+</p:sld>
+</file>
+
+<file path=ppt/slides/slide2.xml><?xml version="1.0" encoding="utf-8"?>
+<p:sld xmlns:a="http://schemas.openxmlformats.org/drawingml/2006/main" xmlns:r="http://schemas.openxmlformats.org/officeDocument/2006/relationships" xmlns:p="http://schemas.openxmlformats.org/presentationml/2006/main">
+  <p:cSld>
+    <p:spTree>
+      <p:nvGrpSpPr>
+        <p:cNvPr id="1" name=""/>
+        <p:cNvGrpSpPr/>
+        <p:nvPr/>
+      </p:nvGrpSpPr>
+      <p:grpSpPr>
+        <a:xfrm>
+          <a:off x="0" y="0"/>
+          <a:ext cx="0" cy="0"/>
+          <a:chOff x="0" y="0"/>
+          <a:chExt cx="0" cy="0"/>
+        </a:xfrm>
+      </p:grpSpPr>
+      <p:sp>
+        <p:nvSpPr>
+          <p:cNvPr id="2" name="Titre 1">
+            <a:extLst>
+              <a:ext uri="{FF2B5EF4-FFF2-40B4-BE49-F238E27FC236}">
+                <a16:creationId xmlns:a16="http://schemas.microsoft.com/office/drawing/2014/main" id="{6841F4A8-32C7-087F-ADC5-EC992FA45176}"/>
+              </a:ext>
+            </a:extLst>
+          </p:cNvPr>
+          <p:cNvSpPr>
+            <a:spLocks noGrp="1"/>
+          </p:cNvSpPr>
+          <p:nvPr>
+            <p:ph type="title"/>
+          </p:nvPr>
+        </p:nvSpPr>
+        <p:spPr/>
+        <p:txBody>
+          <a:bodyPr/>
+          <a:lstStyle/>
+          <a:p>
+            <a:r>
+              <a:rPr lang="en-US" dirty="0"/>
+              <a:t>Benchmarking Methodology Working Group (BMWG)</a:t>
+            </a:r>
+            <a:endParaRPr lang="fr-FR" dirty="0"/>
+          </a:p>
+        </p:txBody>
+      </p:sp>
+      <p:sp>
+        <p:nvSpPr>
+          <p:cNvPr id="3" name="Espace réservé du contenu 2">
+            <a:extLst>
+              <a:ext uri="{FF2B5EF4-FFF2-40B4-BE49-F238E27FC236}">
+                <a16:creationId xmlns:a16="http://schemas.microsoft.com/office/drawing/2014/main" id="{5082E14F-0499-0D67-CCEB-98C164D73BB5}"/>
+              </a:ext>
+            </a:extLst>
+          </p:cNvPr>
+          <p:cNvSpPr>
+            <a:spLocks noGrp="1"/>
+          </p:cNvSpPr>
+          <p:nvPr>
+            <p:ph idx="1"/>
+          </p:nvPr>
+        </p:nvSpPr>
+        <p:spPr>
+          <a:xfrm>
+            <a:off x="838200" y="1627332"/>
+            <a:ext cx="10515600" cy="4729018"/>
+          </a:xfrm>
+        </p:spPr>
+        <p:txBody>
+          <a:bodyPr numCol="2">
+            <a:normAutofit fontScale="92500" lnSpcReduction="20000"/>
+          </a:bodyPr>
+          <a:lstStyle/>
+          <a:p>
+            <a:r>
+              <a:rPr lang="en-US" b="1" dirty="0"/>
+              <a:t>Current WG Hot Topics/Main Issues</a:t>
+            </a:r>
+          </a:p>
+          <a:p>
+            <a:pPr lvl="1"/>
+            <a:r>
+              <a:rPr lang="en-US" dirty="0"/>
+              <a:t>AI Network Fabrics (Training and Inference) Benchmarking and LLM serving Benchmarking</a:t>
+            </a:r>
+          </a:p>
+          <a:p>
+            <a:pPr lvl="1"/>
+            <a:r>
+              <a:rPr lang="en-US" dirty="0"/>
+              <a:t>Benchmarking Methodology for technologies developed in other SDOs (e.g. VNFs) and IETF WGs: e.g. Segment Routing, CATS,…</a:t>
+            </a:r>
+          </a:p>
+          <a:p>
+            <a:pPr lvl="1"/>
+            <a:r>
+              <a:rPr lang="en-US" dirty="0"/>
+              <a:t>Power Consumption Characterization for network devices</a:t>
+            </a:r>
+          </a:p>
+          <a:p>
+            <a:pPr lvl="1"/>
+            <a:r>
+              <a:rPr lang="en-US" dirty="0"/>
+              <a:t>Discussion on revisiting BMWG RFCs to update RFC 2544</a:t>
+            </a:r>
+          </a:p>
+          <a:p>
+            <a:pPr lvl="1"/>
+            <a:r>
+              <a:rPr lang="en-US" dirty="0"/>
+              <a:t>Rechartering to include new work on AI (either for a joint future with IPPM or separately)</a:t>
+            </a:r>
+          </a:p>
+          <a:p>
+            <a:pPr marL="0" indent="0">
+              <a:buNone/>
+            </a:pPr>
+            <a:endParaRPr lang="en-US" b="1" dirty="0"/>
+          </a:p>
+          <a:p>
+            <a:r>
+              <a:rPr lang="en-US" b="1" dirty="0"/>
+              <a:t>Main Achievements Since IETF#124</a:t>
+            </a:r>
+          </a:p>
+          <a:p>
+            <a:pPr lvl="1"/>
+            <a:r>
+              <a:rPr lang="en-US" u="sng" dirty="0"/>
+              <a:t>draft-</a:t>
+            </a:r>
+            <a:r>
+              <a:rPr lang="en-US" u="sng" dirty="0" err="1"/>
+              <a:t>ietf</a:t>
+            </a:r>
+            <a:r>
+              <a:rPr lang="en-US" u="sng" dirty="0"/>
+              <a:t>-bmwg-</a:t>
+            </a:r>
+            <a:r>
+              <a:rPr lang="en-US" u="sng" dirty="0" err="1"/>
+              <a:t>mlrsearch</a:t>
+            </a:r>
+            <a:r>
+              <a:rPr lang="en-US" dirty="0"/>
+              <a:t> in RFC Ed Queue</a:t>
+            </a:r>
+          </a:p>
+          <a:p>
+            <a:pPr lvl="1"/>
+            <a:r>
+              <a:rPr lang="en-US" u="sng" dirty="0"/>
+              <a:t>draft-</a:t>
+            </a:r>
+            <a:r>
+              <a:rPr lang="en-US" u="sng" dirty="0" err="1"/>
+              <a:t>ietf</a:t>
+            </a:r>
+            <a:r>
+              <a:rPr lang="en-US" u="sng" dirty="0"/>
+              <a:t>-bmwg-network-tester-</a:t>
+            </a:r>
+            <a:r>
+              <a:rPr lang="en-US" u="sng" dirty="0" err="1"/>
+              <a:t>cfg</a:t>
+            </a:r>
+            <a:r>
+              <a:rPr lang="en-US" dirty="0"/>
+              <a:t> WGLC concluded: Revised I-D needed</a:t>
+            </a:r>
+          </a:p>
+          <a:p>
+            <a:pPr lvl="1"/>
+            <a:r>
+              <a:rPr lang="en-US" u="sng" dirty="0"/>
+              <a:t>draft-</a:t>
+            </a:r>
+            <a:r>
+              <a:rPr lang="en-US" u="sng" dirty="0" err="1"/>
+              <a:t>ietf</a:t>
+            </a:r>
+            <a:r>
+              <a:rPr lang="en-US" u="sng" dirty="0"/>
+              <a:t>-bmwg-</a:t>
+            </a:r>
+            <a:r>
+              <a:rPr lang="en-US" u="sng" dirty="0" err="1"/>
+              <a:t>sr</a:t>
+            </a:r>
+            <a:r>
+              <a:rPr lang="en-US" u="sng" dirty="0"/>
+              <a:t>-bench-meth</a:t>
+            </a:r>
+            <a:r>
+              <a:rPr lang="en-US" dirty="0"/>
+              <a:t> WGLC concluded</a:t>
+            </a:r>
+          </a:p>
+          <a:p>
+            <a:pPr lvl="1"/>
+            <a:r>
+              <a:rPr lang="en-US" u="sng" dirty="0"/>
+              <a:t>draft-</a:t>
+            </a:r>
+            <a:r>
+              <a:rPr lang="en-US" u="sng" dirty="0" err="1"/>
+              <a:t>ietf</a:t>
+            </a:r>
+            <a:r>
+              <a:rPr lang="en-US" u="sng" dirty="0"/>
+              <a:t>-bmwg-</a:t>
+            </a:r>
+            <a:r>
+              <a:rPr lang="en-US" u="sng" dirty="0" err="1"/>
+              <a:t>savnet</a:t>
+            </a:r>
+            <a:r>
+              <a:rPr lang="en-US" u="sng" dirty="0"/>
+              <a:t>-sav-benchmarking</a:t>
+            </a:r>
+            <a:r>
+              <a:rPr lang="en-US" dirty="0"/>
+              <a:t> adopted</a:t>
+            </a:r>
+          </a:p>
+          <a:p>
+            <a:pPr lvl="1"/>
+            <a:r>
+              <a:rPr lang="en-US" u="sng" dirty="0"/>
+              <a:t>draft-</a:t>
+            </a:r>
+            <a:r>
+              <a:rPr lang="en-US" u="sng" dirty="0" err="1"/>
+              <a:t>ietf</a:t>
+            </a:r>
+            <a:r>
+              <a:rPr lang="en-US" u="sng" dirty="0"/>
+              <a:t>-bmwg-</a:t>
+            </a:r>
+            <a:r>
+              <a:rPr lang="en-US" u="sng" dirty="0" err="1"/>
+              <a:t>powerbench</a:t>
+            </a:r>
+            <a:r>
+              <a:rPr lang="en-US" dirty="0"/>
+              <a:t> adopted</a:t>
+            </a:r>
+          </a:p>
+          <a:p>
+            <a:r>
+              <a:rPr lang="en-US" b="1" dirty="0"/>
+              <a:t>Admin Changes Since IETF#124</a:t>
+            </a:r>
+          </a:p>
+          <a:p>
+            <a:pPr lvl="1"/>
+            <a:r>
+              <a:rPr lang="en-US" dirty="0"/>
+              <a:t>Charter Update: No</a:t>
+            </a:r>
+            <a:endParaRPr lang="en-US" b="1" dirty="0"/>
+          </a:p>
+          <a:p>
+            <a:pPr lvl="1"/>
+            <a:r>
+              <a:rPr lang="en-US" dirty="0"/>
+              <a:t>Leadership Update: No</a:t>
+            </a:r>
+          </a:p>
+          <a:p>
+            <a:endParaRPr lang="en-US" dirty="0"/>
+          </a:p>
+          <a:p>
+            <a:endParaRPr lang="en-US" dirty="0"/>
+          </a:p>
+        </p:txBody>
+      </p:sp>
+      <p:sp>
+        <p:nvSpPr>
+          <p:cNvPr id="5" name="Espace réservé du pied de page 4">
+            <a:extLst>
+              <a:ext uri="{FF2B5EF4-FFF2-40B4-BE49-F238E27FC236}">
+                <a16:creationId xmlns:a16="http://schemas.microsoft.com/office/drawing/2014/main" id="{CBE55EBD-1B16-433A-2B82-E65DC5EA1A56}"/>
+              </a:ext>
+            </a:extLst>
+          </p:cNvPr>
+          <p:cNvSpPr>
+            <a:spLocks noGrp="1"/>
+          </p:cNvSpPr>
+          <p:nvPr>
+            <p:ph type="ftr" sz="quarter" idx="11"/>
+          </p:nvPr>
+        </p:nvSpPr>
+        <p:spPr/>
+        <p:txBody>
+          <a:bodyPr/>
+          <a:lstStyle/>
+          <a:p>
+            <a:r>
+              <a:rPr lang="en-US" dirty="0"/>
+              <a:t>State of the OPSAREA Nation (IETF#125)</a:t>
+            </a:r>
+            <a:endParaRPr lang="fr-FR" dirty="0"/>
+          </a:p>
+        </p:txBody>
+      </p:sp>
+      <p:sp>
+        <p:nvSpPr>
+          <p:cNvPr id="6" name="Espace réservé du numéro de diapositive 5">
+            <a:extLst>
+              <a:ext uri="{FF2B5EF4-FFF2-40B4-BE49-F238E27FC236}">
+                <a16:creationId xmlns:a16="http://schemas.microsoft.com/office/drawing/2014/main" id="{B956CA9C-7437-7A9E-8A7D-F2499DC181BA}"/>
+              </a:ext>
+            </a:extLst>
+          </p:cNvPr>
+          <p:cNvSpPr>
+            <a:spLocks noGrp="1"/>
+          </p:cNvSpPr>
+          <p:nvPr>
+            <p:ph type="sldNum" sz="quarter" idx="12"/>
+          </p:nvPr>
+        </p:nvSpPr>
+        <p:spPr/>
+        <p:txBody>
+          <a:bodyPr/>
+          <a:lstStyle/>
+          <a:p>
+            <a:fld id="{3283A980-FD81-4507-8C36-7D223EFDC6B4}" type="slidenum">
+              <a:rPr lang="fr-FR" smtClean="0"/>
+              <a:t>2</a:t>
+            </a:fld>
+            <a:endParaRPr lang="fr-FR" dirty="0"/>
+          </a:p>
+        </p:txBody>
+      </p:sp>
+    </p:spTree>
+    <p:extLst>
+      <p:ext uri="{BB962C8B-B14F-4D97-AF65-F5344CB8AC3E}">
+        <p14:creationId xmlns:p14="http://schemas.microsoft.com/office/powerpoint/2010/main" val="648215348"/>
       </p:ext>
     </p:extLst>
   </p:cSld>
